--- a/Database Management Systems/09. Vector Databases.pptx
+++ b/Database Management Systems/09. Vector Databases.pptx
@@ -9,8 +9,14 @@
     <p:sldId id="477" r:id="rId3"/>
     <p:sldId id="607" r:id="rId4"/>
     <p:sldId id="478" r:id="rId5"/>
-    <p:sldId id="618" r:id="rId6"/>
-    <p:sldId id="343" r:id="rId7"/>
+    <p:sldId id="619" r:id="rId6"/>
+    <p:sldId id="620" r:id="rId7"/>
+    <p:sldId id="618" r:id="rId8"/>
+    <p:sldId id="621" r:id="rId9"/>
+    <p:sldId id="625" r:id="rId10"/>
+    <p:sldId id="626" r:id="rId11"/>
+    <p:sldId id="623" r:id="rId12"/>
+    <p:sldId id="343" r:id="rId13"/>
   </p:sldIdLst>
   <p:sldSz cx="9144000" cy="6858000" type="screen4x3"/>
   <p:notesSz cx="6858000" cy="9144000"/>
@@ -333,7 +339,7 @@
               <a:pPr>
                 <a:defRPr/>
               </a:pPr>
-              <a:t>5/18/2026</a:t>
+              <a:t>7/7/2026</a:t>
             </a:fld>
             <a:endParaRPr lang="en-US"/>
           </a:p>
@@ -525,7 +531,7 @@
               <a:pPr>
                 <a:defRPr/>
               </a:pPr>
-              <a:t>5/18/2026</a:t>
+              <a:t>7/7/2026</a:t>
             </a:fld>
             <a:endParaRPr lang="en-US"/>
           </a:p>
@@ -727,7 +733,7 @@
               <a:pPr>
                 <a:defRPr/>
               </a:pPr>
-              <a:t>5/18/2026</a:t>
+              <a:t>7/7/2026</a:t>
             </a:fld>
             <a:endParaRPr lang="en-US"/>
           </a:p>
@@ -919,7 +925,7 @@
               <a:pPr>
                 <a:defRPr/>
               </a:pPr>
-              <a:t>5/18/2026</a:t>
+              <a:t>7/7/2026</a:t>
             </a:fld>
             <a:endParaRPr lang="en-US"/>
           </a:p>
@@ -1187,7 +1193,7 @@
               <a:pPr>
                 <a:defRPr/>
               </a:pPr>
-              <a:t>5/18/2026</a:t>
+              <a:t>7/7/2026</a:t>
             </a:fld>
             <a:endParaRPr lang="en-US"/>
           </a:p>
@@ -1497,7 +1503,7 @@
               <a:pPr>
                 <a:defRPr/>
               </a:pPr>
-              <a:t>5/18/2026</a:t>
+              <a:t>7/7/2026</a:t>
             </a:fld>
             <a:endParaRPr lang="en-US"/>
           </a:p>
@@ -1941,7 +1947,7 @@
               <a:pPr>
                 <a:defRPr/>
               </a:pPr>
-              <a:t>5/18/2026</a:t>
+              <a:t>7/7/2026</a:t>
             </a:fld>
             <a:endParaRPr lang="en-US"/>
           </a:p>
@@ -2081,7 +2087,7 @@
               <a:pPr>
                 <a:defRPr/>
               </a:pPr>
-              <a:t>5/18/2026</a:t>
+              <a:t>7/7/2026</a:t>
             </a:fld>
             <a:endParaRPr lang="en-US"/>
           </a:p>
@@ -2198,7 +2204,7 @@
               <a:pPr>
                 <a:defRPr/>
               </a:pPr>
-              <a:t>5/18/2026</a:t>
+              <a:t>7/7/2026</a:t>
             </a:fld>
             <a:endParaRPr lang="en-US"/>
           </a:p>
@@ -2497,7 +2503,7 @@
               <a:pPr>
                 <a:defRPr/>
               </a:pPr>
-              <a:t>5/18/2026</a:t>
+              <a:t>7/7/2026</a:t>
             </a:fld>
             <a:endParaRPr lang="en-US"/>
           </a:p>
@@ -2775,7 +2781,7 @@
               <a:pPr>
                 <a:defRPr/>
               </a:pPr>
-              <a:t>5/18/2026</a:t>
+              <a:t>7/7/2026</a:t>
             </a:fld>
             <a:endParaRPr lang="en-US"/>
           </a:p>
@@ -3023,7 +3029,7 @@
               <a:pPr>
                 <a:defRPr/>
               </a:pPr>
-              <a:t>5/18/2026</a:t>
+              <a:t>7/7/2026</a:t>
             </a:fld>
             <a:endParaRPr lang="en-US"/>
           </a:p>
@@ -3556,7 +3562,6 @@
               <a:rPr lang="en-US" sz="6000" dirty="0" smtClean="0"/>
               <a:t>Vector Databases</a:t>
             </a:r>
-            <a:endParaRPr lang="en-US" sz="6000" dirty="0" smtClean="0"/>
           </a:p>
         </p:txBody>
       </p:sp>
@@ -3653,6 +3658,355 @@
           </a:p>
         </p:txBody>
       </p:sp>
+    </p:spTree>
+  </p:cSld>
+  <p:clrMapOvr>
+    <a:masterClrMapping/>
+  </p:clrMapOvr>
+  <p:timing>
+    <p:tnLst>
+      <p:par>
+        <p:cTn id="1" dur="indefinite" restart="never" nodeType="tmRoot"/>
+      </p:par>
+    </p:tnLst>
+  </p:timing>
+</p:sld>
+</file>
+
+<file path=ppt/slides/slide10.xml><?xml version="1.0" encoding="utf-8"?>
+<p:sld xmlns:a="http://schemas.openxmlformats.org/drawingml/2006/main" xmlns:r="http://schemas.openxmlformats.org/officeDocument/2006/relationships" xmlns:p="http://schemas.openxmlformats.org/presentationml/2006/main">
+  <p:cSld>
+    <p:spTree>
+      <p:nvGrpSpPr>
+        <p:cNvPr id="1" name=""/>
+        <p:cNvGrpSpPr/>
+        <p:nvPr/>
+      </p:nvGrpSpPr>
+      <p:grpSpPr>
+        <a:xfrm>
+          <a:off x="0" y="0"/>
+          <a:ext cx="0" cy="0"/>
+          <a:chOff x="0" y="0"/>
+          <a:chExt cx="0" cy="0"/>
+        </a:xfrm>
+      </p:grpSpPr>
+      <p:sp>
+        <p:nvSpPr>
+          <p:cNvPr id="2" name="Title 1"/>
+          <p:cNvSpPr>
+            <a:spLocks noGrp="1"/>
+          </p:cNvSpPr>
+          <p:nvPr>
+            <p:ph type="title"/>
+          </p:nvPr>
+        </p:nvSpPr>
+        <p:spPr/>
+        <p:txBody>
+          <a:bodyPr/>
+          <a:lstStyle/>
+          <a:p>
+            <a:r>
+              <a:rPr lang="en-US" dirty="0" smtClean="0"/>
+              <a:t>Scaling Vector Database</a:t>
+            </a:r>
+            <a:endParaRPr lang="en-US" dirty="0"/>
+          </a:p>
+        </p:txBody>
+      </p:sp>
+      <p:sp>
+        <p:nvSpPr>
+          <p:cNvPr id="3" name="Content Placeholder 2"/>
+          <p:cNvSpPr>
+            <a:spLocks noGrp="1"/>
+          </p:cNvSpPr>
+          <p:nvPr>
+            <p:ph idx="1"/>
+          </p:nvPr>
+        </p:nvSpPr>
+        <p:spPr/>
+        <p:txBody>
+          <a:bodyPr/>
+          <a:lstStyle/>
+          <a:p>
+            <a:r>
+              <a:rPr lang="en-US" sz="2400" dirty="0" smtClean="0"/>
+              <a:t>Naive </a:t>
+            </a:r>
+            <a:r>
+              <a:rPr lang="en-US" sz="2400" dirty="0" smtClean="0"/>
+              <a:t>HNSW cannot reasonably work for billion </a:t>
+            </a:r>
+            <a:r>
+              <a:rPr lang="en-US" sz="2400" dirty="0" smtClean="0"/>
+              <a:t>vectors.</a:t>
+            </a:r>
+          </a:p>
+          <a:p>
+            <a:r>
+              <a:rPr lang="en-US" sz="2400" b="1" dirty="0" smtClean="0"/>
+              <a:t>(2017). Billion-scale similarity search with GPUs</a:t>
+            </a:r>
+            <a:r>
+              <a:rPr lang="en-US" sz="2400" b="1" dirty="0" smtClean="0"/>
+              <a:t>.</a:t>
+            </a:r>
+          </a:p>
+          <a:p>
+            <a:r>
+              <a:rPr lang="en-US" sz="2400" b="1" dirty="0" smtClean="0"/>
+              <a:t>(2024). The FAISS Library.</a:t>
+            </a:r>
+            <a:endParaRPr lang="en-US" sz="2400" dirty="0" smtClean="0"/>
+          </a:p>
+          <a:p>
+            <a:r>
+              <a:rPr lang="en-US" sz="2400" dirty="0" smtClean="0"/>
+              <a:t>FAISS-style </a:t>
+            </a:r>
+            <a:r>
+              <a:rPr lang="en-US" sz="2400" dirty="0" smtClean="0"/>
+              <a:t>GPU search combines exact search, approximate search, and compressed-domain search with optimized GPU k-selection.</a:t>
+            </a:r>
+          </a:p>
+          <a:p>
+            <a:r>
+              <a:rPr lang="en-US" sz="2400" dirty="0" smtClean="0"/>
+              <a:t>FAISS is useful if you care about implementation at billion-vector scale.</a:t>
+            </a:r>
+          </a:p>
+          <a:p>
+            <a:r>
+              <a:rPr lang="en-US" sz="2400" b="1" dirty="0" smtClean="0"/>
+              <a:t>(</a:t>
+            </a:r>
+            <a:r>
+              <a:rPr lang="en-US" sz="2400" b="1" dirty="0" smtClean="0"/>
+              <a:t>2019). </a:t>
+            </a:r>
+            <a:r>
+              <a:rPr lang="en-US" sz="2400" b="1" dirty="0" err="1" smtClean="0"/>
+              <a:t>DiskANN</a:t>
+            </a:r>
+            <a:r>
+              <a:rPr lang="en-US" sz="2400" b="1" dirty="0" smtClean="0"/>
+              <a:t>: </a:t>
+            </a:r>
+            <a:r>
+              <a:rPr lang="en-US" sz="2400" b="1" dirty="0" smtClean="0"/>
+              <a:t>Fast Accurate Billion-point Nearest Neighbor Search on a Single </a:t>
+            </a:r>
+            <a:r>
+              <a:rPr lang="en-US" sz="2400" b="1" dirty="0" smtClean="0"/>
+              <a:t>Node.</a:t>
+            </a:r>
+          </a:p>
+          <a:p>
+            <a:endParaRPr lang="en-US" sz="2400" b="1" dirty="0" smtClean="0"/>
+          </a:p>
+          <a:p>
+            <a:endParaRPr lang="en-US" sz="2400" dirty="0"/>
+          </a:p>
+        </p:txBody>
+      </p:sp>
+    </p:spTree>
+  </p:cSld>
+  <p:clrMapOvr>
+    <a:masterClrMapping/>
+  </p:clrMapOvr>
+</p:sld>
+</file>
+
+<file path=ppt/slides/slide11.xml><?xml version="1.0" encoding="utf-8"?>
+<p:sld xmlns:a="http://schemas.openxmlformats.org/drawingml/2006/main" xmlns:r="http://schemas.openxmlformats.org/officeDocument/2006/relationships" xmlns:p="http://schemas.openxmlformats.org/presentationml/2006/main">
+  <p:cSld>
+    <p:spTree>
+      <p:nvGrpSpPr>
+        <p:cNvPr id="1" name=""/>
+        <p:cNvGrpSpPr/>
+        <p:nvPr/>
+      </p:nvGrpSpPr>
+      <p:grpSpPr>
+        <a:xfrm>
+          <a:off x="0" y="0"/>
+          <a:ext cx="0" cy="0"/>
+          <a:chOff x="0" y="0"/>
+          <a:chExt cx="0" cy="0"/>
+        </a:xfrm>
+      </p:grpSpPr>
+      <p:sp>
+        <p:nvSpPr>
+          <p:cNvPr id="2" name="Title 1"/>
+          <p:cNvSpPr>
+            <a:spLocks noGrp="1"/>
+          </p:cNvSpPr>
+          <p:nvPr>
+            <p:ph type="title"/>
+          </p:nvPr>
+        </p:nvSpPr>
+        <p:spPr/>
+        <p:txBody>
+          <a:bodyPr/>
+          <a:lstStyle/>
+          <a:p>
+            <a:r>
+              <a:rPr lang="en-US" dirty="0" smtClean="0"/>
+              <a:t>Product Quantization</a:t>
+            </a:r>
+            <a:endParaRPr lang="en-US" dirty="0"/>
+          </a:p>
+        </p:txBody>
+      </p:sp>
+      <p:sp>
+        <p:nvSpPr>
+          <p:cNvPr id="3" name="Content Placeholder 2"/>
+          <p:cNvSpPr>
+            <a:spLocks noGrp="1"/>
+          </p:cNvSpPr>
+          <p:nvPr>
+            <p:ph idx="1"/>
+          </p:nvPr>
+        </p:nvSpPr>
+        <p:spPr/>
+        <p:txBody>
+          <a:bodyPr/>
+          <a:lstStyle/>
+          <a:p>
+            <a:r>
+              <a:rPr lang="en-US" sz="2400" b="1" dirty="0" err="1" smtClean="0"/>
+              <a:t>Herve</a:t>
+            </a:r>
+            <a:r>
+              <a:rPr lang="en-US" sz="2400" b="1" dirty="0" smtClean="0"/>
+              <a:t> </a:t>
+            </a:r>
+            <a:r>
+              <a:rPr lang="en-US" sz="2400" b="1" dirty="0" err="1" smtClean="0"/>
+              <a:t>Jego</a:t>
+            </a:r>
+            <a:r>
+              <a:rPr lang="en-US" sz="2400" b="1" dirty="0" smtClean="0"/>
+              <a:t> et al. (2010). Product quantization for nearest neighbor </a:t>
+            </a:r>
+            <a:r>
+              <a:rPr lang="en-US" sz="2400" b="1" dirty="0" smtClean="0"/>
+              <a:t>search.</a:t>
+            </a:r>
+          </a:p>
+          <a:p>
+            <a:r>
+              <a:rPr lang="en-US" sz="2400" dirty="0" smtClean="0"/>
+              <a:t>Product Quantization compresses vectors into short </a:t>
+            </a:r>
+            <a:r>
+              <a:rPr lang="en-US" sz="2400" dirty="0" smtClean="0"/>
+              <a:t>codes.</a:t>
+            </a:r>
+          </a:p>
+          <a:p>
+            <a:r>
+              <a:rPr lang="en-US" sz="2400" dirty="0" smtClean="0"/>
+              <a:t>It </a:t>
+            </a:r>
+            <a:r>
+              <a:rPr lang="en-US" sz="2400" dirty="0" smtClean="0"/>
+              <a:t>splits a vector into sub-vectors, quantizes each subspace separately, and estimates distances using lookup tables instead of full vector </a:t>
+            </a:r>
+            <a:r>
+              <a:rPr lang="en-US" sz="2400" dirty="0" smtClean="0"/>
+              <a:t>comparisons.</a:t>
+            </a:r>
+          </a:p>
+          <a:p>
+            <a:r>
+              <a:rPr lang="en-US" sz="2400" dirty="0" smtClean="0"/>
+              <a:t>This </a:t>
+            </a:r>
+            <a:r>
+              <a:rPr lang="en-US" sz="2400" dirty="0" smtClean="0"/>
+              <a:t>is important for billion-scale search and is used heavily in FAISS-style systems.</a:t>
+            </a:r>
+            <a:endParaRPr lang="en-US" sz="2400" dirty="0"/>
+          </a:p>
+        </p:txBody>
+      </p:sp>
+    </p:spTree>
+  </p:cSld>
+  <p:clrMapOvr>
+    <a:masterClrMapping/>
+  </p:clrMapOvr>
+</p:sld>
+</file>
+
+<file path=ppt/slides/slide12.xml><?xml version="1.0" encoding="utf-8"?>
+<p:sld xmlns:a="http://schemas.openxmlformats.org/drawingml/2006/main" xmlns:r="http://schemas.openxmlformats.org/officeDocument/2006/relationships" xmlns:p="http://schemas.openxmlformats.org/presentationml/2006/main">
+  <p:cSld>
+    <p:spTree>
+      <p:nvGrpSpPr>
+        <p:cNvPr id="1" name=""/>
+        <p:cNvGrpSpPr/>
+        <p:nvPr/>
+      </p:nvGrpSpPr>
+      <p:grpSpPr>
+        <a:xfrm>
+          <a:off x="0" y="0"/>
+          <a:ext cx="0" cy="0"/>
+          <a:chOff x="0" y="0"/>
+          <a:chExt cx="0" cy="0"/>
+        </a:xfrm>
+      </p:grpSpPr>
+      <p:sp>
+        <p:nvSpPr>
+          <p:cNvPr id="18434" name="Title 1"/>
+          <p:cNvSpPr>
+            <a:spLocks noGrp="1"/>
+          </p:cNvSpPr>
+          <p:nvPr>
+            <p:ph type="title"/>
+          </p:nvPr>
+        </p:nvSpPr>
+        <p:spPr/>
+        <p:txBody>
+          <a:bodyPr/>
+          <a:lstStyle/>
+          <a:p>
+            <a:pPr eaLnBrk="1" hangingPunct="1"/>
+            <a:r>
+              <a:rPr lang="en-US" dirty="0" smtClean="0"/>
+              <a:t>Thank You &amp; See </a:t>
+            </a:r>
+            <a:r>
+              <a:rPr lang="en-US" smtClean="0"/>
+              <a:t>You Again</a:t>
+            </a:r>
+            <a:endParaRPr lang="en-US" dirty="0" smtClean="0"/>
+          </a:p>
+        </p:txBody>
+      </p:sp>
+      <p:pic>
+        <p:nvPicPr>
+          <p:cNvPr id="5" name="Content Placeholder 4"/>
+          <p:cNvPicPr>
+            <a:picLocks noGrp="1" noChangeAspect="1" noChangeArrowheads="1"/>
+          </p:cNvPicPr>
+          <p:nvPr>
+            <p:ph idx="1"/>
+          </p:nvPr>
+        </p:nvPicPr>
+        <p:blipFill>
+          <a:blip r:embed="rId2" cstate="print"/>
+          <a:srcRect/>
+          <a:stretch>
+            <a:fillRect/>
+          </a:stretch>
+        </p:blipFill>
+        <p:spPr>
+          <a:xfrm>
+            <a:off x="1143000" y="1676400"/>
+            <a:ext cx="6810375" cy="4525963"/>
+          </a:xfrm>
+          <a:noFill/>
+        </p:spPr>
+      </p:pic>
     </p:spTree>
   </p:cSld>
   <p:clrMapOvr>
@@ -4010,6 +4364,333 @@
           <a:chExt cx="0" cy="0"/>
         </a:xfrm>
       </p:grpSpPr>
+      <p:sp>
+        <p:nvSpPr>
+          <p:cNvPr id="2" name="Title 1"/>
+          <p:cNvSpPr>
+            <a:spLocks noGrp="1"/>
+          </p:cNvSpPr>
+          <p:nvPr>
+            <p:ph type="title"/>
+          </p:nvPr>
+        </p:nvSpPr>
+        <p:spPr/>
+        <p:txBody>
+          <a:bodyPr/>
+          <a:lstStyle/>
+          <a:p>
+            <a:r>
+              <a:rPr lang="en-US" dirty="0" smtClean="0"/>
+              <a:t>k-dimensional binary search </a:t>
+            </a:r>
+            <a:r>
+              <a:rPr lang="en-US" dirty="0" smtClean="0"/>
+              <a:t>trees</a:t>
+            </a:r>
+            <a:endParaRPr lang="en-US" dirty="0"/>
+          </a:p>
+        </p:txBody>
+      </p:sp>
+      <p:sp>
+        <p:nvSpPr>
+          <p:cNvPr id="3" name="Content Placeholder 2"/>
+          <p:cNvSpPr>
+            <a:spLocks noGrp="1"/>
+          </p:cNvSpPr>
+          <p:nvPr>
+            <p:ph idx="1"/>
+          </p:nvPr>
+        </p:nvSpPr>
+        <p:spPr/>
+        <p:txBody>
+          <a:bodyPr/>
+          <a:lstStyle/>
+          <a:p>
+            <a:r>
+              <a:rPr lang="en-US" sz="2000" b="1" dirty="0" smtClean="0"/>
+              <a:t>Jon Louis Bentley (1975). Multidimensional  Binary Search Trees Used for Associative </a:t>
+            </a:r>
+            <a:r>
+              <a:rPr lang="en-US" sz="2000" b="1" dirty="0" smtClean="0"/>
+              <a:t>Searching.</a:t>
+            </a:r>
+          </a:p>
+          <a:p>
+            <a:r>
+              <a:rPr lang="en-US" sz="2000" dirty="0" smtClean="0"/>
+              <a:t>A </a:t>
+            </a:r>
+            <a:r>
+              <a:rPr lang="en-US" sz="2000" b="1" dirty="0" smtClean="0"/>
+              <a:t>k-d tree</a:t>
+            </a:r>
+            <a:r>
+              <a:rPr lang="en-US" sz="2000" dirty="0" smtClean="0"/>
+              <a:t> is like a binary search tree, but instead of sorting by one key, it alternates between dimensions. The </a:t>
+            </a:r>
+            <a:r>
+              <a:rPr lang="en-US" sz="2000" dirty="0" smtClean="0"/>
+              <a:t>"k" </a:t>
+            </a:r>
+            <a:r>
+              <a:rPr lang="en-US" sz="2000" dirty="0" smtClean="0"/>
+              <a:t>means the number of dimensions, such as 2D, 3D, or 128D.</a:t>
+            </a:r>
+            <a:endParaRPr lang="en-US" sz="2000" dirty="0" smtClean="0"/>
+          </a:p>
+          <a:p>
+            <a:r>
+              <a:rPr lang="en-US" sz="2000" dirty="0" smtClean="0"/>
+              <a:t>For 2D points, it may split by:</a:t>
+            </a:r>
+          </a:p>
+          <a:p>
+            <a:pPr lvl="1"/>
+            <a:r>
+              <a:rPr lang="en-US" sz="1800" dirty="0" smtClean="0"/>
+              <a:t>Level 0: x </a:t>
+            </a:r>
+            <a:r>
+              <a:rPr lang="en-US" sz="1800" dirty="0" smtClean="0"/>
+              <a:t>coordinate</a:t>
+            </a:r>
+          </a:p>
+          <a:p>
+            <a:pPr lvl="1"/>
+            <a:r>
+              <a:rPr lang="en-US" sz="1800" dirty="0" smtClean="0"/>
+              <a:t>Level </a:t>
+            </a:r>
+            <a:r>
+              <a:rPr lang="en-US" sz="1800" dirty="0" smtClean="0"/>
+              <a:t>1: y </a:t>
+            </a:r>
+            <a:r>
+              <a:rPr lang="en-US" sz="1800" dirty="0" smtClean="0"/>
+              <a:t>coordinate</a:t>
+            </a:r>
+          </a:p>
+          <a:p>
+            <a:pPr lvl="1"/>
+            <a:r>
+              <a:rPr lang="en-US" sz="1800" dirty="0" smtClean="0"/>
+              <a:t>Level </a:t>
+            </a:r>
+            <a:r>
+              <a:rPr lang="en-US" sz="1800" dirty="0" smtClean="0"/>
+              <a:t>2: x </a:t>
+            </a:r>
+            <a:r>
+              <a:rPr lang="en-US" sz="1800" dirty="0" smtClean="0"/>
+              <a:t>coordinate</a:t>
+            </a:r>
+          </a:p>
+          <a:p>
+            <a:pPr lvl="1"/>
+            <a:r>
+              <a:rPr lang="en-US" sz="1800" dirty="0" smtClean="0"/>
+              <a:t>Level </a:t>
+            </a:r>
+            <a:r>
+              <a:rPr lang="en-US" sz="1800" dirty="0" smtClean="0"/>
+              <a:t>3: y coordinate</a:t>
+            </a:r>
+          </a:p>
+          <a:p>
+            <a:r>
+              <a:rPr lang="en-US" sz="2000" dirty="0" smtClean="0"/>
+              <a:t>A k-d tree avoids checking many points because each split creates a geometric boundary. During search, if the query is already closer to the current best point than it is to the boundary of an unexplored region, that whole region cannot contain a better answer.</a:t>
+            </a:r>
+            <a:endParaRPr lang="en-US" sz="2000" dirty="0"/>
+          </a:p>
+        </p:txBody>
+      </p:sp>
+    </p:spTree>
+  </p:cSld>
+  <p:clrMapOvr>
+    <a:masterClrMapping/>
+  </p:clrMapOvr>
+</p:sld>
+</file>
+
+<file path=ppt/slides/slide6.xml><?xml version="1.0" encoding="utf-8"?>
+<p:sld xmlns:a="http://schemas.openxmlformats.org/drawingml/2006/main" xmlns:r="http://schemas.openxmlformats.org/officeDocument/2006/relationships" xmlns:p="http://schemas.openxmlformats.org/presentationml/2006/main">
+  <p:cSld>
+    <p:spTree>
+      <p:nvGrpSpPr>
+        <p:cNvPr id="1" name=""/>
+        <p:cNvGrpSpPr/>
+        <p:nvPr/>
+      </p:nvGrpSpPr>
+      <p:grpSpPr>
+        <a:xfrm>
+          <a:off x="0" y="0"/>
+          <a:ext cx="0" cy="0"/>
+          <a:chOff x="0" y="0"/>
+          <a:chExt cx="0" cy="0"/>
+        </a:xfrm>
+      </p:grpSpPr>
+      <p:sp>
+        <p:nvSpPr>
+          <p:cNvPr id="2" name="Title 1"/>
+          <p:cNvSpPr>
+            <a:spLocks noGrp="1"/>
+          </p:cNvSpPr>
+          <p:nvPr>
+            <p:ph type="title"/>
+          </p:nvPr>
+        </p:nvSpPr>
+        <p:spPr/>
+        <p:txBody>
+          <a:bodyPr/>
+          <a:lstStyle/>
+          <a:p>
+            <a:r>
+              <a:rPr lang="en-US" dirty="0" smtClean="0"/>
+              <a:t>Searching k-d tree</a:t>
+            </a:r>
+            <a:endParaRPr lang="en-US" dirty="0"/>
+          </a:p>
+        </p:txBody>
+      </p:sp>
+      <p:sp>
+        <p:nvSpPr>
+          <p:cNvPr id="3" name="Content Placeholder 2"/>
+          <p:cNvSpPr>
+            <a:spLocks noGrp="1"/>
+          </p:cNvSpPr>
+          <p:nvPr>
+            <p:ph idx="1"/>
+          </p:nvPr>
+        </p:nvSpPr>
+        <p:spPr/>
+        <p:txBody>
+          <a:bodyPr/>
+          <a:lstStyle/>
+          <a:p>
+            <a:r>
+              <a:rPr lang="en-US" sz="2000" dirty="0" smtClean="0"/>
+              <a:t>A </a:t>
+            </a:r>
+            <a:r>
+              <a:rPr lang="en-US" sz="2000" b="1" dirty="0" smtClean="0"/>
+              <a:t>k-d tree can be used for exact search or approximate search</a:t>
+            </a:r>
+            <a:r>
+              <a:rPr lang="en-US" sz="2000" dirty="0" smtClean="0"/>
+              <a:t>, depending on the search algorithm.</a:t>
+            </a:r>
+          </a:p>
+          <a:p>
+            <a:r>
+              <a:rPr lang="en-US" sz="2000" dirty="0" smtClean="0"/>
+              <a:t>The original idea is an </a:t>
+            </a:r>
+            <a:r>
+              <a:rPr lang="en-US" sz="2000" b="1" dirty="0" smtClean="0"/>
+              <a:t>exact spatial index</a:t>
+            </a:r>
+            <a:r>
+              <a:rPr lang="en-US" sz="2000" dirty="0" smtClean="0"/>
+              <a:t>. If you perform full backtracking and only prune a region when it is mathematically impossible for that region to contain a closer point, the result is exact</a:t>
+            </a:r>
+            <a:r>
+              <a:rPr lang="en-US" sz="2000" dirty="0" smtClean="0"/>
+              <a:t>.</a:t>
+            </a:r>
+          </a:p>
+          <a:p>
+            <a:r>
+              <a:rPr lang="en-US" sz="2000" dirty="0" smtClean="0"/>
+              <a:t>Exact </a:t>
+            </a:r>
+            <a:r>
+              <a:rPr lang="en-US" sz="2000" dirty="0" smtClean="0"/>
+              <a:t>k-d tree search </a:t>
+            </a:r>
+            <a:r>
+              <a:rPr lang="en-US" sz="2000" dirty="0" smtClean="0"/>
+              <a:t>means: Skip </a:t>
+            </a:r>
+            <a:r>
+              <a:rPr lang="en-US" sz="2000" dirty="0" smtClean="0"/>
+              <a:t>a </a:t>
+            </a:r>
+            <a:r>
+              <a:rPr lang="en-US" sz="2000" dirty="0" err="1" smtClean="0"/>
+              <a:t>subtree</a:t>
+            </a:r>
+            <a:r>
+              <a:rPr lang="en-US" sz="2000" dirty="0" smtClean="0"/>
+              <a:t> only when geometry proves it cannot contain a better answer</a:t>
+            </a:r>
+            <a:r>
+              <a:rPr lang="en-US" sz="2000" dirty="0" smtClean="0"/>
+              <a:t>.</a:t>
+            </a:r>
+          </a:p>
+          <a:p>
+            <a:r>
+              <a:rPr lang="en-US" sz="2000" dirty="0" smtClean="0"/>
+              <a:t>Approximate k-d tree search </a:t>
+            </a:r>
+            <a:r>
+              <a:rPr lang="en-US" sz="2000" dirty="0" smtClean="0"/>
+              <a:t>means: Skip </a:t>
+            </a:r>
+            <a:r>
+              <a:rPr lang="en-US" sz="2000" dirty="0" smtClean="0"/>
+              <a:t>a </a:t>
+            </a:r>
+            <a:r>
+              <a:rPr lang="en-US" sz="2000" dirty="0" err="1" smtClean="0"/>
+              <a:t>subtree</a:t>
+            </a:r>
+            <a:r>
+              <a:rPr lang="en-US" sz="2000" dirty="0" smtClean="0"/>
+              <a:t> because it is probably not useful, or because we set a time/visit limit.</a:t>
+            </a:r>
+          </a:p>
+          <a:p>
+            <a:r>
+              <a:rPr lang="en-US" sz="2000" dirty="0" smtClean="0"/>
+              <a:t>For low-dimensional data, exact k-d tree search can work well. For high-dimensional embeddings, exact k-d tree search often loses its advantage and may need to check many points, sometimes nearly all points</a:t>
+            </a:r>
+            <a:r>
+              <a:rPr lang="en-US" sz="2000" dirty="0" smtClean="0"/>
+              <a:t>.</a:t>
+            </a:r>
+          </a:p>
+          <a:p>
+            <a:endParaRPr lang="en-US" sz="2000" dirty="0"/>
+          </a:p>
+        </p:txBody>
+      </p:sp>
+    </p:spTree>
+  </p:cSld>
+  <p:clrMapOvr>
+    <a:masterClrMapping/>
+  </p:clrMapOvr>
+</p:sld>
+</file>
+
+<file path=ppt/slides/slide7.xml><?xml version="1.0" encoding="utf-8"?>
+<p:sld xmlns:a="http://schemas.openxmlformats.org/drawingml/2006/main" xmlns:r="http://schemas.openxmlformats.org/officeDocument/2006/relationships" xmlns:p="http://schemas.openxmlformats.org/presentationml/2006/main">
+  <p:cSld>
+    <p:spTree>
+      <p:nvGrpSpPr>
+        <p:cNvPr id="1" name=""/>
+        <p:cNvGrpSpPr/>
+        <p:nvPr/>
+      </p:nvGrpSpPr>
+      <p:grpSpPr>
+        <a:xfrm>
+          <a:off x="0" y="0"/>
+          <a:ext cx="0" cy="0"/>
+          <a:chOff x="0" y="0"/>
+          <a:chExt cx="0" cy="0"/>
+        </a:xfrm>
+      </p:grpSpPr>
       <p:pic>
         <p:nvPicPr>
           <p:cNvPr id="2" name="Picture 2" descr="https://lh3.ggpht.com/1IfZLL2QDSjZ0wS7sUhaMlsAOS8BBzdR3wZ1WawgRn7KZAM8nEVZYMOUM-lqQb0ikIzp=w300"/>
@@ -4044,7 +4725,7 @@
 </p:sld>
 </file>
 
-<file path=ppt/slides/slide6.xml><?xml version="1.0" encoding="utf-8"?>
+<file path=ppt/slides/slide8.xml><?xml version="1.0" encoding="utf-8"?>
 <p:sld xmlns:a="http://schemas.openxmlformats.org/drawingml/2006/main" xmlns:r="http://schemas.openxmlformats.org/officeDocument/2006/relationships" xmlns:p="http://schemas.openxmlformats.org/presentationml/2006/main">
   <p:cSld>
     <p:spTree>
@@ -4063,7 +4744,7 @@
       </p:grpSpPr>
       <p:sp>
         <p:nvSpPr>
-          <p:cNvPr id="18434" name="Title 1"/>
+          <p:cNvPr id="2" name="Title 1"/>
           <p:cNvSpPr>
             <a:spLocks noGrp="1"/>
           </p:cNvSpPr>
@@ -4076,56 +4757,228 @@
           <a:bodyPr/>
           <a:lstStyle/>
           <a:p>
-            <a:pPr eaLnBrk="1" hangingPunct="1"/>
             <a:r>
               <a:rPr lang="en-US" dirty="0" smtClean="0"/>
-              <a:t>Thank You &amp; See </a:t>
-            </a:r>
-            <a:r>
-              <a:rPr lang="en-US" smtClean="0"/>
-              <a:t>You Again</a:t>
-            </a:r>
-            <a:endParaRPr lang="en-US" dirty="0" smtClean="0"/>
-          </a:p>
-        </p:txBody>
-      </p:sp>
-      <p:pic>
-        <p:nvPicPr>
-          <p:cNvPr id="5" name="Content Placeholder 4"/>
-          <p:cNvPicPr>
-            <a:picLocks noGrp="1" noChangeAspect="1" noChangeArrowheads="1"/>
-          </p:cNvPicPr>
+              <a:t>Hierarchical Navigable Small World</a:t>
+            </a:r>
+            <a:endParaRPr lang="en-US" dirty="0"/>
+          </a:p>
+        </p:txBody>
+      </p:sp>
+      <p:sp>
+        <p:nvSpPr>
+          <p:cNvPr id="3" name="Content Placeholder 2"/>
+          <p:cNvSpPr>
+            <a:spLocks noGrp="1"/>
+          </p:cNvSpPr>
           <p:nvPr>
             <p:ph idx="1"/>
           </p:nvPr>
-        </p:nvPicPr>
-        <p:blipFill>
-          <a:blip r:embed="rId2" cstate="print"/>
-          <a:srcRect/>
-          <a:stretch>
-            <a:fillRect/>
-          </a:stretch>
-        </p:blipFill>
-        <p:spPr>
-          <a:xfrm>
-            <a:off x="1143000" y="1676400"/>
-            <a:ext cx="6810375" cy="4525963"/>
-          </a:xfrm>
-          <a:noFill/>
-        </p:spPr>
-      </p:pic>
+        </p:nvSpPr>
+        <p:spPr/>
+        <p:txBody>
+          <a:bodyPr/>
+          <a:lstStyle/>
+          <a:p>
+            <a:r>
+              <a:rPr lang="en-US" sz="2400" b="1" dirty="0" smtClean="0"/>
+              <a:t>Yu. A. </a:t>
+            </a:r>
+            <a:r>
+              <a:rPr lang="en-US" sz="2400" b="1" dirty="0" err="1" smtClean="0"/>
+              <a:t>Malkov</a:t>
+            </a:r>
+            <a:r>
+              <a:rPr lang="en-US" sz="2400" b="1" dirty="0" smtClean="0"/>
+              <a:t> and D. A. </a:t>
+            </a:r>
+            <a:r>
+              <a:rPr lang="en-US" sz="2400" b="1" dirty="0" err="1" smtClean="0"/>
+              <a:t>Yashunin</a:t>
+            </a:r>
+            <a:r>
+              <a:rPr lang="en-US" sz="2400" b="1" dirty="0" smtClean="0"/>
+              <a:t> (2016). Efficient and robust approximate nearest neighbor search using Hierarchical Navigable </a:t>
+            </a:r>
+            <a:r>
+              <a:rPr lang="en-US" sz="2400" b="1" dirty="0" smtClean="0"/>
+              <a:t>Small </a:t>
+            </a:r>
+            <a:r>
+              <a:rPr lang="en-US" sz="2400" b="1" dirty="0" smtClean="0"/>
+              <a:t>World </a:t>
+            </a:r>
+            <a:r>
+              <a:rPr lang="en-US" sz="2400" b="1" dirty="0" smtClean="0"/>
+              <a:t>graphs.</a:t>
+            </a:r>
+          </a:p>
+          <a:p>
+            <a:r>
+              <a:rPr lang="en-US" sz="2400" dirty="0" smtClean="0"/>
+              <a:t>HNSW builds a multi-layer graph of </a:t>
+            </a:r>
+            <a:r>
+              <a:rPr lang="en-US" sz="2400" dirty="0" smtClean="0"/>
+              <a:t>vectors.</a:t>
+            </a:r>
+          </a:p>
+          <a:p>
+            <a:r>
+              <a:rPr lang="en-US" sz="2400" dirty="0" smtClean="0"/>
+              <a:t>Nearby </a:t>
+            </a:r>
+            <a:r>
+              <a:rPr lang="en-US" sz="2400" dirty="0" smtClean="0"/>
+              <a:t>vectors are connected by edges. Upper layers are sparse and support long jumps; lower layers are denser and refine the </a:t>
+            </a:r>
+            <a:r>
+              <a:rPr lang="en-US" sz="2400" dirty="0" smtClean="0"/>
+              <a:t>search.</a:t>
+            </a:r>
+          </a:p>
+          <a:p>
+            <a:r>
+              <a:rPr lang="en-US" sz="2400" dirty="0" smtClean="0"/>
+              <a:t>A </a:t>
+            </a:r>
+            <a:r>
+              <a:rPr lang="en-US" sz="2400" dirty="0" smtClean="0"/>
+              <a:t>query starts at an entry point in the top layer, greedily moves to closer nodes, descends layer by layer, and finally performs a broader candidate search near the bottom layer.</a:t>
+            </a:r>
+            <a:endParaRPr lang="en-US" sz="2400" dirty="0"/>
+          </a:p>
+        </p:txBody>
+      </p:sp>
     </p:spTree>
   </p:cSld>
   <p:clrMapOvr>
     <a:masterClrMapping/>
   </p:clrMapOvr>
-  <p:timing>
-    <p:tnLst>
-      <p:par>
-        <p:cTn id="1" dur="indefinite" restart="never" nodeType="tmRoot"/>
-      </p:par>
-    </p:tnLst>
-  </p:timing>
+</p:sld>
+</file>
+
+<file path=ppt/slides/slide9.xml><?xml version="1.0" encoding="utf-8"?>
+<p:sld xmlns:a="http://schemas.openxmlformats.org/drawingml/2006/main" xmlns:r="http://schemas.openxmlformats.org/officeDocument/2006/relationships" xmlns:p="http://schemas.openxmlformats.org/presentationml/2006/main">
+  <p:cSld>
+    <p:spTree>
+      <p:nvGrpSpPr>
+        <p:cNvPr id="1" name=""/>
+        <p:cNvGrpSpPr/>
+        <p:nvPr/>
+      </p:nvGrpSpPr>
+      <p:grpSpPr>
+        <a:xfrm>
+          <a:off x="0" y="0"/>
+          <a:ext cx="0" cy="0"/>
+          <a:chOff x="0" y="0"/>
+          <a:chExt cx="0" cy="0"/>
+        </a:xfrm>
+      </p:grpSpPr>
+      <p:sp>
+        <p:nvSpPr>
+          <p:cNvPr id="2" name="Title 1"/>
+          <p:cNvSpPr>
+            <a:spLocks noGrp="1"/>
+          </p:cNvSpPr>
+          <p:nvPr>
+            <p:ph type="title"/>
+          </p:nvPr>
+        </p:nvSpPr>
+        <p:spPr/>
+        <p:txBody>
+          <a:bodyPr/>
+          <a:lstStyle/>
+          <a:p>
+            <a:r>
+              <a:rPr lang="en-US" dirty="0" smtClean="0"/>
+              <a:t>HNSW Insertion and Search</a:t>
+            </a:r>
+            <a:endParaRPr lang="en-US" dirty="0"/>
+          </a:p>
+        </p:txBody>
+      </p:sp>
+      <p:sp>
+        <p:nvSpPr>
+          <p:cNvPr id="3" name="Content Placeholder 2"/>
+          <p:cNvSpPr>
+            <a:spLocks noGrp="1"/>
+          </p:cNvSpPr>
+          <p:nvPr>
+            <p:ph idx="1"/>
+          </p:nvPr>
+        </p:nvSpPr>
+        <p:spPr/>
+        <p:txBody>
+          <a:bodyPr/>
+          <a:lstStyle/>
+          <a:p>
+            <a:r>
+              <a:rPr lang="en-US" sz="2400" dirty="0" smtClean="0"/>
+              <a:t>In graph-based approximate nearest-neighbor search, such as HNSW, the index stores vectors together with a proximity </a:t>
+            </a:r>
+            <a:r>
+              <a:rPr lang="en-US" sz="2400" dirty="0" smtClean="0"/>
+              <a:t>graph.</a:t>
+            </a:r>
+          </a:p>
+          <a:p>
+            <a:r>
+              <a:rPr lang="en-US" sz="2400" dirty="0" smtClean="0"/>
+              <a:t>During </a:t>
+            </a:r>
+            <a:r>
+              <a:rPr lang="en-US" sz="2400" b="1" dirty="0" smtClean="0"/>
+              <a:t>insertion</a:t>
+            </a:r>
+            <a:r>
+              <a:rPr lang="en-US" sz="2400" dirty="0" smtClean="0"/>
+              <a:t>, a graph-based index such as HNSW still has to compare the new vector with existing vectors, but it does </a:t>
+            </a:r>
+            <a:r>
+              <a:rPr lang="en-US" sz="2400" b="1" dirty="0" smtClean="0"/>
+              <a:t>not</a:t>
+            </a:r>
+            <a:r>
+              <a:rPr lang="en-US" sz="2400" dirty="0" smtClean="0"/>
+              <a:t> compare against all existing vectors.</a:t>
+            </a:r>
+          </a:p>
+          <a:p>
+            <a:r>
+              <a:rPr lang="en-US" sz="2400" dirty="0" smtClean="0"/>
+              <a:t>It performs an </a:t>
+            </a:r>
+            <a:r>
+              <a:rPr lang="en-US" sz="2400" b="1" dirty="0" smtClean="0"/>
+              <a:t>approximate search using the graph that already exists</a:t>
+            </a:r>
+            <a:r>
+              <a:rPr lang="en-US" sz="2400" dirty="0" smtClean="0"/>
+              <a:t>, then connects the new vector to the best candidates it found.</a:t>
+            </a:r>
+          </a:p>
+          <a:p>
+            <a:r>
+              <a:rPr lang="en-US" sz="2400" dirty="0" smtClean="0"/>
+              <a:t>Search </a:t>
+            </a:r>
+            <a:r>
+              <a:rPr lang="en-US" sz="2400" dirty="0" smtClean="0"/>
+              <a:t>is then performed by navigating the graph from coarse to fine neighborhoods, instead of comparing the query against every vector</a:t>
+            </a:r>
+            <a:r>
+              <a:rPr lang="en-US" sz="2400" dirty="0" smtClean="0"/>
+              <a:t>.</a:t>
+            </a:r>
+          </a:p>
+        </p:txBody>
+      </p:sp>
+    </p:spTree>
+  </p:cSld>
+  <p:clrMapOvr>
+    <a:masterClrMapping/>
+  </p:clrMapOvr>
 </p:sld>
 </file>
 
